--- a/TTL/NOT GATE/NOT TTL.pptx
+++ b/TTL/NOT GATE/NOT TTL.pptx
@@ -11,6 +11,7 @@
     <p:sldId id="265" r:id="rId5"/>
     <p:sldId id="264" r:id="rId6"/>
     <p:sldId id="267" r:id="rId7"/>
+    <p:sldId id="268" r:id="rId8"/>
   </p:sldIdLst>
   <p:sldSz cx="12192000" cy="6858000"/>
   <p:notesSz cx="6858000" cy="9144000"/>
@@ -275,7 +276,7 @@
           <a:p>
             <a:fld id="{A6919780-8624-4B22-92F5-9C160EF8EA05}" type="datetimeFigureOut">
               <a:rPr lang="en-US" smtClean="0"/>
-              <a:t>3/17/2025</a:t>
+              <a:t>5/19/2025</a:t>
             </a:fld>
             <a:endParaRPr lang="en-US"/>
           </a:p>
@@ -473,7 +474,7 @@
           <a:p>
             <a:fld id="{A6919780-8624-4B22-92F5-9C160EF8EA05}" type="datetimeFigureOut">
               <a:rPr lang="en-US" smtClean="0"/>
-              <a:t>3/17/2025</a:t>
+              <a:t>5/19/2025</a:t>
             </a:fld>
             <a:endParaRPr lang="en-US"/>
           </a:p>
@@ -681,7 +682,7 @@
           <a:p>
             <a:fld id="{A6919780-8624-4B22-92F5-9C160EF8EA05}" type="datetimeFigureOut">
               <a:rPr lang="en-US" smtClean="0"/>
-              <a:t>3/17/2025</a:t>
+              <a:t>5/19/2025</a:t>
             </a:fld>
             <a:endParaRPr lang="en-US"/>
           </a:p>
@@ -879,7 +880,7 @@
           <a:p>
             <a:fld id="{A6919780-8624-4B22-92F5-9C160EF8EA05}" type="datetimeFigureOut">
               <a:rPr lang="en-US" smtClean="0"/>
-              <a:t>3/17/2025</a:t>
+              <a:t>5/19/2025</a:t>
             </a:fld>
             <a:endParaRPr lang="en-US"/>
           </a:p>
@@ -1154,7 +1155,7 @@
           <a:p>
             <a:fld id="{A6919780-8624-4B22-92F5-9C160EF8EA05}" type="datetimeFigureOut">
               <a:rPr lang="en-US" smtClean="0"/>
-              <a:t>3/17/2025</a:t>
+              <a:t>5/19/2025</a:t>
             </a:fld>
             <a:endParaRPr lang="en-US"/>
           </a:p>
@@ -1419,7 +1420,7 @@
           <a:p>
             <a:fld id="{A6919780-8624-4B22-92F5-9C160EF8EA05}" type="datetimeFigureOut">
               <a:rPr lang="en-US" smtClean="0"/>
-              <a:t>3/17/2025</a:t>
+              <a:t>5/19/2025</a:t>
             </a:fld>
             <a:endParaRPr lang="en-US"/>
           </a:p>
@@ -1831,7 +1832,7 @@
           <a:p>
             <a:fld id="{A6919780-8624-4B22-92F5-9C160EF8EA05}" type="datetimeFigureOut">
               <a:rPr lang="en-US" smtClean="0"/>
-              <a:t>3/17/2025</a:t>
+              <a:t>5/19/2025</a:t>
             </a:fld>
             <a:endParaRPr lang="en-US"/>
           </a:p>
@@ -1972,7 +1973,7 @@
           <a:p>
             <a:fld id="{A6919780-8624-4B22-92F5-9C160EF8EA05}" type="datetimeFigureOut">
               <a:rPr lang="en-US" smtClean="0"/>
-              <a:t>3/17/2025</a:t>
+              <a:t>5/19/2025</a:t>
             </a:fld>
             <a:endParaRPr lang="en-US"/>
           </a:p>
@@ -2085,7 +2086,7 @@
           <a:p>
             <a:fld id="{A6919780-8624-4B22-92F5-9C160EF8EA05}" type="datetimeFigureOut">
               <a:rPr lang="en-US" smtClean="0"/>
-              <a:t>3/17/2025</a:t>
+              <a:t>5/19/2025</a:t>
             </a:fld>
             <a:endParaRPr lang="en-US"/>
           </a:p>
@@ -2396,7 +2397,7 @@
           <a:p>
             <a:fld id="{A6919780-8624-4B22-92F5-9C160EF8EA05}" type="datetimeFigureOut">
               <a:rPr lang="en-US" smtClean="0"/>
-              <a:t>3/17/2025</a:t>
+              <a:t>5/19/2025</a:t>
             </a:fld>
             <a:endParaRPr lang="en-US"/>
           </a:p>
@@ -2684,7 +2685,7 @@
           <a:p>
             <a:fld id="{A6919780-8624-4B22-92F5-9C160EF8EA05}" type="datetimeFigureOut">
               <a:rPr lang="en-US" smtClean="0"/>
-              <a:t>3/17/2025</a:t>
+              <a:t>5/19/2025</a:t>
             </a:fld>
             <a:endParaRPr lang="en-US"/>
           </a:p>
@@ -2925,7 +2926,7 @@
           <a:p>
             <a:fld id="{A6919780-8624-4B22-92F5-9C160EF8EA05}" type="datetimeFigureOut">
               <a:rPr lang="en-US" smtClean="0"/>
-              <a:t>3/17/2025</a:t>
+              <a:t>5/19/2025</a:t>
             </a:fld>
             <a:endParaRPr lang="en-US"/>
           </a:p>
@@ -3879,13 +3880,13 @@
   <p:clrMapOvr>
     <a:masterClrMapping/>
   </p:clrMapOvr>
-  <mc:AlternateContent xmlns:mc="http://schemas.openxmlformats.org/markup-compatibility/2006">
-    <mc:Choice xmlns:p159="http://schemas.microsoft.com/office/powerpoint/2015/09/main" Requires="p159">
+  <mc:AlternateContent xmlns:mc="http://schemas.openxmlformats.org/markup-compatibility/2006" xmlns:p159="http://schemas.microsoft.com/office/powerpoint/2015/09/main">
+    <mc:Choice Requires="p159">
       <p:transition xmlns:p14="http://schemas.microsoft.com/office/powerpoint/2010/main" spd="slow" p14:dur="2000">
         <p159:morph option="byObject"/>
       </p:transition>
     </mc:Choice>
-    <mc:Fallback>
+    <mc:Fallback xmlns="">
       <p:transition spd="slow">
         <p:fade/>
       </p:transition>
@@ -11144,6 +11145,53 @@
           </a:p>
         </p:txBody>
       </p:sp>
+      <p:cxnSp>
+        <p:nvCxnSpPr>
+          <p:cNvPr id="6" name="Straight Arrow Connector 8">
+            <a:extLst>
+              <a:ext uri="{FF2B5EF4-FFF2-40B4-BE49-F238E27FC236}">
+                <a16:creationId xmlns:a16="http://schemas.microsoft.com/office/drawing/2014/main" id="{DE158687-3478-335F-47BD-FBF342AB6AB3}"/>
+              </a:ext>
+            </a:extLst>
+          </p:cNvPr>
+          <p:cNvCxnSpPr>
+            <a:cxnSpLocks/>
+          </p:cNvCxnSpPr>
+          <p:nvPr/>
+        </p:nvCxnSpPr>
+        <p:spPr>
+          <a:xfrm flipV="1">
+            <a:off x="4288062" y="3912727"/>
+            <a:ext cx="2335892" cy="481437"/>
+          </a:xfrm>
+          <a:prstGeom prst="bentConnector3">
+            <a:avLst>
+              <a:gd name="adj1" fmla="val 50000"/>
+            </a:avLst>
+          </a:prstGeom>
+          <a:ln w="38100">
+            <a:solidFill>
+              <a:srgbClr val="FF0000"/>
+            </a:solidFill>
+            <a:prstDash val="dashDot"/>
+            <a:tailEnd type="triangle"/>
+          </a:ln>
+        </p:spPr>
+        <p:style>
+          <a:lnRef idx="1">
+            <a:schemeClr val="accent1"/>
+          </a:lnRef>
+          <a:fillRef idx="0">
+            <a:schemeClr val="accent1"/>
+          </a:fillRef>
+          <a:effectRef idx="0">
+            <a:schemeClr val="accent1"/>
+          </a:effectRef>
+          <a:fontRef idx="minor">
+            <a:schemeClr val="tx1"/>
+          </a:fontRef>
+        </p:style>
+      </p:cxnSp>
     </p:spTree>
     <p:extLst>
       <p:ext uri="{BB962C8B-B14F-4D97-AF65-F5344CB8AC3E}">
@@ -11206,6 +11254,41 @@
                                         <p:cTn id="7" dur="1000"/>
                                         <p:tgtEl>
                                           <p:spTgt spid="9"/>
+                                        </p:tgtEl>
+                                      </p:cBhvr>
+                                    </p:animEffect>
+                                  </p:childTnLst>
+                                </p:cTn>
+                              </p:par>
+                              <p:par>
+                                <p:cTn id="8" presetID="22" presetClass="entr" presetSubtype="8" repeatCount="indefinite" fill="hold" nodeType="withEffect">
+                                  <p:stCondLst>
+                                    <p:cond delay="0"/>
+                                  </p:stCondLst>
+                                  <p:childTnLst>
+                                    <p:set>
+                                      <p:cBhvr>
+                                        <p:cTn id="9" dur="1" fill="hold">
+                                          <p:stCondLst>
+                                            <p:cond delay="0"/>
+                                          </p:stCondLst>
+                                        </p:cTn>
+                                        <p:tgtEl>
+                                          <p:spTgt spid="6"/>
+                                        </p:tgtEl>
+                                        <p:attrNameLst>
+                                          <p:attrName>style.visibility</p:attrName>
+                                        </p:attrNameLst>
+                                      </p:cBhvr>
+                                      <p:to>
+                                        <p:strVal val="visible"/>
+                                      </p:to>
+                                    </p:set>
+                                    <p:animEffect transition="in" filter="wipe(left)">
+                                      <p:cBhvr>
+                                        <p:cTn id="10" dur="1000"/>
+                                        <p:tgtEl>
+                                          <p:spTgt spid="6"/>
                                         </p:tgtEl>
                                       </p:cBhvr>
                                     </p:animEffect>
@@ -12936,6 +13019,53 @@
           </a:p>
         </p:txBody>
       </p:sp>
+      <p:cxnSp>
+        <p:nvCxnSpPr>
+          <p:cNvPr id="6" name="Straight Arrow Connector 8">
+            <a:extLst>
+              <a:ext uri="{FF2B5EF4-FFF2-40B4-BE49-F238E27FC236}">
+                <a16:creationId xmlns:a16="http://schemas.microsoft.com/office/drawing/2014/main" id="{50951433-3C80-61A7-6F58-E62A56BA97DD}"/>
+              </a:ext>
+            </a:extLst>
+          </p:cNvPr>
+          <p:cNvCxnSpPr>
+            <a:cxnSpLocks/>
+          </p:cNvCxnSpPr>
+          <p:nvPr/>
+        </p:nvCxnSpPr>
+        <p:spPr>
+          <a:xfrm flipV="1">
+            <a:off x="4288062" y="3912727"/>
+            <a:ext cx="2335892" cy="481437"/>
+          </a:xfrm>
+          <a:prstGeom prst="bentConnector3">
+            <a:avLst>
+              <a:gd name="adj1" fmla="val 50000"/>
+            </a:avLst>
+          </a:prstGeom>
+          <a:ln w="38100">
+            <a:solidFill>
+              <a:srgbClr val="FF0000"/>
+            </a:solidFill>
+            <a:prstDash val="dashDot"/>
+            <a:tailEnd type="triangle"/>
+          </a:ln>
+        </p:spPr>
+        <p:style>
+          <a:lnRef idx="1">
+            <a:schemeClr val="accent1"/>
+          </a:lnRef>
+          <a:fillRef idx="0">
+            <a:schemeClr val="accent1"/>
+          </a:fillRef>
+          <a:effectRef idx="0">
+            <a:schemeClr val="accent1"/>
+          </a:effectRef>
+          <a:fontRef idx="minor">
+            <a:schemeClr val="tx1"/>
+          </a:fontRef>
+        </p:style>
+      </p:cxnSp>
     </p:spTree>
     <p:extLst>
       <p:ext uri="{BB962C8B-B14F-4D97-AF65-F5344CB8AC3E}">
@@ -13004,6 +13134,41 @@
                                   </p:childTnLst>
                                 </p:cTn>
                               </p:par>
+                              <p:par>
+                                <p:cTn id="8" presetID="22" presetClass="entr" presetSubtype="8" repeatCount="indefinite" fill="hold" nodeType="withEffect">
+                                  <p:stCondLst>
+                                    <p:cond delay="0"/>
+                                  </p:stCondLst>
+                                  <p:childTnLst>
+                                    <p:set>
+                                      <p:cBhvr>
+                                        <p:cTn id="9" dur="1" fill="hold">
+                                          <p:stCondLst>
+                                            <p:cond delay="0"/>
+                                          </p:stCondLst>
+                                        </p:cTn>
+                                        <p:tgtEl>
+                                          <p:spTgt spid="6"/>
+                                        </p:tgtEl>
+                                        <p:attrNameLst>
+                                          <p:attrName>style.visibility</p:attrName>
+                                        </p:attrNameLst>
+                                      </p:cBhvr>
+                                      <p:to>
+                                        <p:strVal val="visible"/>
+                                      </p:to>
+                                    </p:set>
+                                    <p:animEffect transition="in" filter="wipe(left)">
+                                      <p:cBhvr>
+                                        <p:cTn id="10" dur="1000"/>
+                                        <p:tgtEl>
+                                          <p:spTgt spid="6"/>
+                                        </p:tgtEl>
+                                      </p:cBhvr>
+                                    </p:animEffect>
+                                  </p:childTnLst>
+                                </p:cTn>
+                              </p:par>
                             </p:childTnLst>
                           </p:cTn>
                         </p:par>
@@ -13032,6 +13197,1727 @@
       </p:par>
     </p:tnLst>
   </p:timing>
+</p:sld>
+</file>
+
+<file path=ppt/slides/slide7.xml><?xml version="1.0" encoding="utf-8"?>
+<p:sld xmlns:a="http://schemas.openxmlformats.org/drawingml/2006/main" xmlns:r="http://schemas.openxmlformats.org/officeDocument/2006/relationships" xmlns:p="http://schemas.openxmlformats.org/presentationml/2006/main">
+  <p:cSld>
+    <p:spTree>
+      <p:nvGrpSpPr>
+        <p:cNvPr id="1" name="">
+          <a:extLst>
+            <a:ext uri="{FF2B5EF4-FFF2-40B4-BE49-F238E27FC236}">
+              <a16:creationId xmlns:a16="http://schemas.microsoft.com/office/drawing/2014/main" id="{EC0E095C-0CCD-2C18-7511-A4D62826C049}"/>
+            </a:ext>
+          </a:extLst>
+        </p:cNvPr>
+        <p:cNvGrpSpPr/>
+        <p:nvPr/>
+      </p:nvGrpSpPr>
+      <p:grpSpPr>
+        <a:xfrm>
+          <a:off x="0" y="0"/>
+          <a:ext cx="0" cy="0"/>
+          <a:chOff x="0" y="0"/>
+          <a:chExt cx="0" cy="0"/>
+        </a:xfrm>
+      </p:grpSpPr>
+      <p:grpSp>
+        <p:nvGrpSpPr>
+          <p:cNvPr id="61" name="Group 60">
+            <a:extLst>
+              <a:ext uri="{FF2B5EF4-FFF2-40B4-BE49-F238E27FC236}">
+                <a16:creationId xmlns:a16="http://schemas.microsoft.com/office/drawing/2014/main" id="{07E3F322-C853-9EF4-77E9-3AA4D81136F6}"/>
+              </a:ext>
+            </a:extLst>
+          </p:cNvPr>
+          <p:cNvGrpSpPr/>
+          <p:nvPr/>
+        </p:nvGrpSpPr>
+        <p:grpSpPr>
+          <a:xfrm>
+            <a:off x="1248494" y="212018"/>
+            <a:ext cx="9362661" cy="4373217"/>
+            <a:chOff x="2374526" y="1193181"/>
+            <a:chExt cx="7863210" cy="3058000"/>
+          </a:xfrm>
+        </p:grpSpPr>
+        <p:pic>
+          <p:nvPicPr>
+            <p:cNvPr id="3" name="Picture 2">
+              <a:extLst>
+                <a:ext uri="{FF2B5EF4-FFF2-40B4-BE49-F238E27FC236}">
+                  <a16:creationId xmlns:a16="http://schemas.microsoft.com/office/drawing/2014/main" id="{94AD0FEB-1CE9-387C-3FEA-60FA50CD28F8}"/>
+                </a:ext>
+              </a:extLst>
+            </p:cNvPr>
+            <p:cNvPicPr>
+              <a:picLocks noChangeAspect="1"/>
+            </p:cNvPicPr>
+            <p:nvPr/>
+          </p:nvPicPr>
+          <p:blipFill>
+            <a:blip r:embed="rId2">
+              <a:extLst>
+                <a:ext uri="{28A0092B-C50C-407E-A947-70E740481C1C}">
+                  <a14:useLocalDpi xmlns:a14="http://schemas.microsoft.com/office/drawing/2010/main" val="0"/>
+                </a:ext>
+              </a:extLst>
+            </a:blip>
+            <a:stretch>
+              <a:fillRect/>
+            </a:stretch>
+          </p:blipFill>
+          <p:spPr>
+            <a:xfrm>
+              <a:off x="5864526" y="2105820"/>
+              <a:ext cx="1556561" cy="1556561"/>
+            </a:xfrm>
+            <a:prstGeom prst="rect">
+              <a:avLst/>
+            </a:prstGeom>
+          </p:spPr>
+        </p:pic>
+        <p:pic>
+          <p:nvPicPr>
+            <p:cNvPr id="8" name="Picture 7">
+              <a:extLst>
+                <a:ext uri="{FF2B5EF4-FFF2-40B4-BE49-F238E27FC236}">
+                  <a16:creationId xmlns:a16="http://schemas.microsoft.com/office/drawing/2014/main" id="{A7836A26-E498-E103-CEF1-8C37AF5FE4C1}"/>
+                </a:ext>
+              </a:extLst>
+            </p:cNvPr>
+            <p:cNvPicPr>
+              <a:picLocks noChangeAspect="1"/>
+            </p:cNvPicPr>
+            <p:nvPr/>
+          </p:nvPicPr>
+          <p:blipFill>
+            <a:blip r:embed="rId3">
+              <a:extLst>
+                <a:ext uri="{28A0092B-C50C-407E-A947-70E740481C1C}">
+                  <a14:useLocalDpi xmlns:a14="http://schemas.microsoft.com/office/drawing/2010/main" val="0"/>
+                </a:ext>
+              </a:extLst>
+            </a:blip>
+            <a:stretch>
+              <a:fillRect/>
+            </a:stretch>
+          </p:blipFill>
+          <p:spPr>
+            <a:xfrm rot="5400000">
+              <a:off x="2374526" y="1193181"/>
+              <a:ext cx="1364105" cy="1364105"/>
+            </a:xfrm>
+            <a:prstGeom prst="rect">
+              <a:avLst/>
+            </a:prstGeom>
+          </p:spPr>
+        </p:pic>
+        <p:pic>
+          <p:nvPicPr>
+            <p:cNvPr id="10" name="Picture 9">
+              <a:extLst>
+                <a:ext uri="{FF2B5EF4-FFF2-40B4-BE49-F238E27FC236}">
+                  <a16:creationId xmlns:a16="http://schemas.microsoft.com/office/drawing/2014/main" id="{5AC919A5-067B-B2E3-458B-B1A083BE87AA}"/>
+                </a:ext>
+              </a:extLst>
+            </p:cNvPr>
+            <p:cNvPicPr>
+              <a:picLocks noChangeAspect="1"/>
+            </p:cNvPicPr>
+            <p:nvPr/>
+          </p:nvPicPr>
+          <p:blipFill>
+            <a:blip r:embed="rId4">
+              <a:extLst>
+                <a:ext uri="{28A0092B-C50C-407E-A947-70E740481C1C}">
+                  <a14:useLocalDpi xmlns:a14="http://schemas.microsoft.com/office/drawing/2010/main" val="0"/>
+                </a:ext>
+              </a:extLst>
+            </a:blip>
+            <a:srcRect l="28724" t="21357" r="22826" b="29462"/>
+            <a:stretch/>
+          </p:blipFill>
+          <p:spPr>
+            <a:xfrm>
+              <a:off x="8681175" y="2031818"/>
+              <a:ext cx="1556561" cy="1580051"/>
+            </a:xfrm>
+            <a:prstGeom prst="rect">
+              <a:avLst/>
+            </a:prstGeom>
+          </p:spPr>
+        </p:pic>
+        <p:pic>
+          <p:nvPicPr>
+            <p:cNvPr id="12" name="Picture 11">
+              <a:extLst>
+                <a:ext uri="{FF2B5EF4-FFF2-40B4-BE49-F238E27FC236}">
+                  <a16:creationId xmlns:a16="http://schemas.microsoft.com/office/drawing/2014/main" id="{C31E8BE6-2CDE-C7B3-1F23-2E3D5C9E720D}"/>
+                </a:ext>
+              </a:extLst>
+            </p:cNvPr>
+            <p:cNvPicPr>
+              <a:picLocks noChangeAspect="1"/>
+            </p:cNvPicPr>
+            <p:nvPr/>
+          </p:nvPicPr>
+          <p:blipFill>
+            <a:blip r:embed="rId5">
+              <a:extLst>
+                <a:ext uri="{28A0092B-C50C-407E-A947-70E740481C1C}">
+                  <a14:useLocalDpi xmlns:a14="http://schemas.microsoft.com/office/drawing/2010/main" val="0"/>
+                </a:ext>
+              </a:extLst>
+            </a:blip>
+            <a:srcRect t="34341" b="45338"/>
+            <a:stretch/>
+          </p:blipFill>
+          <p:spPr>
+            <a:xfrm rot="5400000">
+              <a:off x="8341486" y="2045075"/>
+              <a:ext cx="947169" cy="192477"/>
+            </a:xfrm>
+            <a:prstGeom prst="rect">
+              <a:avLst/>
+            </a:prstGeom>
+          </p:spPr>
+        </p:pic>
+        <p:pic>
+          <p:nvPicPr>
+            <p:cNvPr id="14" name="Picture 13">
+              <a:extLst>
+                <a:ext uri="{FF2B5EF4-FFF2-40B4-BE49-F238E27FC236}">
+                  <a16:creationId xmlns:a16="http://schemas.microsoft.com/office/drawing/2014/main" id="{65953E5E-74BB-A634-8C28-84FA7A58D714}"/>
+                </a:ext>
+              </a:extLst>
+            </p:cNvPr>
+            <p:cNvPicPr>
+              <a:picLocks noChangeAspect="1"/>
+            </p:cNvPicPr>
+            <p:nvPr/>
+          </p:nvPicPr>
+          <p:blipFill>
+            <a:blip r:embed="rId6">
+              <a:extLst>
+                <a:ext uri="{28A0092B-C50C-407E-A947-70E740481C1C}">
+                  <a14:useLocalDpi xmlns:a14="http://schemas.microsoft.com/office/drawing/2010/main" val="0"/>
+                </a:ext>
+              </a:extLst>
+            </a:blip>
+            <a:srcRect t="36811" b="36590"/>
+            <a:stretch/>
+          </p:blipFill>
+          <p:spPr>
+            <a:xfrm rot="5400000" flipV="1">
+              <a:off x="4355617" y="3372090"/>
+              <a:ext cx="752375" cy="107239"/>
+            </a:xfrm>
+            <a:prstGeom prst="rect">
+              <a:avLst/>
+            </a:prstGeom>
+          </p:spPr>
+        </p:pic>
+        <p:cxnSp>
+          <p:nvCxnSpPr>
+            <p:cNvPr id="18" name="Straight Connector 17">
+              <a:extLst>
+                <a:ext uri="{FF2B5EF4-FFF2-40B4-BE49-F238E27FC236}">
+                  <a16:creationId xmlns:a16="http://schemas.microsoft.com/office/drawing/2014/main" id="{A49AC4F9-879D-E4D0-0830-A11375BE5CE7}"/>
+                </a:ext>
+              </a:extLst>
+            </p:cNvPr>
+            <p:cNvCxnSpPr>
+              <a:cxnSpLocks/>
+            </p:cNvCxnSpPr>
+            <p:nvPr/>
+          </p:nvCxnSpPr>
+          <p:spPr>
+            <a:xfrm>
+              <a:off x="8815070" y="2488623"/>
+              <a:ext cx="0" cy="940377"/>
+            </a:xfrm>
+            <a:prstGeom prst="line">
+              <a:avLst/>
+            </a:prstGeom>
+            <a:ln w="38100">
+              <a:solidFill>
+                <a:schemeClr val="tx1"/>
+              </a:solidFill>
+            </a:ln>
+          </p:spPr>
+          <p:style>
+            <a:lnRef idx="1">
+              <a:schemeClr val="dk1"/>
+            </a:lnRef>
+            <a:fillRef idx="0">
+              <a:schemeClr val="dk1"/>
+            </a:fillRef>
+            <a:effectRef idx="0">
+              <a:schemeClr val="dk1"/>
+            </a:effectRef>
+            <a:fontRef idx="minor">
+              <a:schemeClr val="tx1"/>
+            </a:fontRef>
+          </p:style>
+        </p:cxnSp>
+        <p:cxnSp>
+          <p:nvCxnSpPr>
+            <p:cNvPr id="22" name="Straight Connector 21">
+              <a:extLst>
+                <a:ext uri="{FF2B5EF4-FFF2-40B4-BE49-F238E27FC236}">
+                  <a16:creationId xmlns:a16="http://schemas.microsoft.com/office/drawing/2014/main" id="{AAC26C18-8B32-629B-B730-D1D984751D43}"/>
+                </a:ext>
+              </a:extLst>
+            </p:cNvPr>
+            <p:cNvCxnSpPr>
+              <a:cxnSpLocks/>
+            </p:cNvCxnSpPr>
+            <p:nvPr/>
+          </p:nvCxnSpPr>
+          <p:spPr>
+            <a:xfrm>
+              <a:off x="3657600" y="1709811"/>
+              <a:ext cx="5157470" cy="0"/>
+            </a:xfrm>
+            <a:prstGeom prst="line">
+              <a:avLst/>
+            </a:prstGeom>
+            <a:ln w="38100">
+              <a:solidFill>
+                <a:schemeClr val="tx1"/>
+              </a:solidFill>
+            </a:ln>
+          </p:spPr>
+          <p:style>
+            <a:lnRef idx="1">
+              <a:schemeClr val="dk1"/>
+            </a:lnRef>
+            <a:fillRef idx="0">
+              <a:schemeClr val="dk1"/>
+            </a:fillRef>
+            <a:effectRef idx="0">
+              <a:schemeClr val="dk1"/>
+            </a:effectRef>
+            <a:fontRef idx="minor">
+              <a:schemeClr val="tx1"/>
+            </a:fontRef>
+          </p:style>
+        </p:cxnSp>
+        <p:cxnSp>
+          <p:nvCxnSpPr>
+            <p:cNvPr id="26" name="Straight Connector 25">
+              <a:extLst>
+                <a:ext uri="{FF2B5EF4-FFF2-40B4-BE49-F238E27FC236}">
+                  <a16:creationId xmlns:a16="http://schemas.microsoft.com/office/drawing/2014/main" id="{6C4E406B-639B-2E3D-75B9-D769C7A77DDF}"/>
+                </a:ext>
+              </a:extLst>
+            </p:cNvPr>
+            <p:cNvCxnSpPr>
+              <a:cxnSpLocks/>
+            </p:cNvCxnSpPr>
+            <p:nvPr/>
+          </p:nvCxnSpPr>
+          <p:spPr>
+            <a:xfrm>
+              <a:off x="4801578" y="1704668"/>
+              <a:ext cx="0" cy="910230"/>
+            </a:xfrm>
+            <a:prstGeom prst="line">
+              <a:avLst/>
+            </a:prstGeom>
+            <a:ln w="38100">
+              <a:solidFill>
+                <a:schemeClr val="tx1"/>
+              </a:solidFill>
+            </a:ln>
+          </p:spPr>
+          <p:style>
+            <a:lnRef idx="1">
+              <a:schemeClr val="dk1"/>
+            </a:lnRef>
+            <a:fillRef idx="0">
+              <a:schemeClr val="dk1"/>
+            </a:fillRef>
+            <a:effectRef idx="0">
+              <a:schemeClr val="dk1"/>
+            </a:effectRef>
+            <a:fontRef idx="minor">
+              <a:schemeClr val="tx1"/>
+            </a:fontRef>
+          </p:style>
+        </p:cxnSp>
+        <p:pic>
+          <p:nvPicPr>
+            <p:cNvPr id="16" name="Picture 15">
+              <a:extLst>
+                <a:ext uri="{FF2B5EF4-FFF2-40B4-BE49-F238E27FC236}">
+                  <a16:creationId xmlns:a16="http://schemas.microsoft.com/office/drawing/2014/main" id="{2A75AD40-9302-1A76-FC9A-F2D4C8E737C8}"/>
+                </a:ext>
+              </a:extLst>
+            </p:cNvPr>
+            <p:cNvPicPr>
+              <a:picLocks noChangeAspect="1"/>
+            </p:cNvPicPr>
+            <p:nvPr/>
+          </p:nvPicPr>
+          <p:blipFill>
+            <a:blip r:embed="rId7">
+              <a:extLst>
+                <a:ext uri="{28A0092B-C50C-407E-A947-70E740481C1C}">
+                  <a14:useLocalDpi xmlns:a14="http://schemas.microsoft.com/office/drawing/2010/main" val="0"/>
+                </a:ext>
+              </a:extLst>
+            </a:blip>
+            <a:stretch>
+              <a:fillRect/>
+            </a:stretch>
+          </p:blipFill>
+          <p:spPr>
+            <a:xfrm>
+              <a:off x="4346634" y="1875233"/>
+              <a:ext cx="1023106" cy="1008868"/>
+            </a:xfrm>
+            <a:prstGeom prst="rect">
+              <a:avLst/>
+            </a:prstGeom>
+          </p:spPr>
+        </p:pic>
+        <p:cxnSp>
+          <p:nvCxnSpPr>
+            <p:cNvPr id="28" name="Straight Connector 27">
+              <a:extLst>
+                <a:ext uri="{FF2B5EF4-FFF2-40B4-BE49-F238E27FC236}">
+                  <a16:creationId xmlns:a16="http://schemas.microsoft.com/office/drawing/2014/main" id="{9C27605B-545C-CBAE-ED60-2627C2CB8258}"/>
+                </a:ext>
+              </a:extLst>
+            </p:cNvPr>
+            <p:cNvCxnSpPr>
+              <a:cxnSpLocks/>
+            </p:cNvCxnSpPr>
+            <p:nvPr/>
+          </p:nvCxnSpPr>
+          <p:spPr>
+            <a:xfrm>
+              <a:off x="4719969" y="2733472"/>
+              <a:ext cx="0" cy="316050"/>
+            </a:xfrm>
+            <a:prstGeom prst="line">
+              <a:avLst/>
+            </a:prstGeom>
+            <a:ln w="38100">
+              <a:solidFill>
+                <a:schemeClr val="tx1"/>
+              </a:solidFill>
+            </a:ln>
+          </p:spPr>
+          <p:style>
+            <a:lnRef idx="1">
+              <a:schemeClr val="dk1"/>
+            </a:lnRef>
+            <a:fillRef idx="0">
+              <a:schemeClr val="dk1"/>
+            </a:fillRef>
+            <a:effectRef idx="0">
+              <a:schemeClr val="dk1"/>
+            </a:effectRef>
+            <a:fontRef idx="minor">
+              <a:schemeClr val="tx1"/>
+            </a:fontRef>
+          </p:style>
+        </p:cxnSp>
+        <p:cxnSp>
+          <p:nvCxnSpPr>
+            <p:cNvPr id="32" name="Straight Connector 31">
+              <a:extLst>
+                <a:ext uri="{FF2B5EF4-FFF2-40B4-BE49-F238E27FC236}">
+                  <a16:creationId xmlns:a16="http://schemas.microsoft.com/office/drawing/2014/main" id="{42635A6A-9054-69C8-57CA-3B8932EBEB53}"/>
+                </a:ext>
+              </a:extLst>
+            </p:cNvPr>
+            <p:cNvCxnSpPr>
+              <a:cxnSpLocks/>
+            </p:cNvCxnSpPr>
+            <p:nvPr/>
+          </p:nvCxnSpPr>
+          <p:spPr>
+            <a:xfrm>
+              <a:off x="7032713" y="3429000"/>
+              <a:ext cx="1782357" cy="0"/>
+            </a:xfrm>
+            <a:prstGeom prst="line">
+              <a:avLst/>
+            </a:prstGeom>
+            <a:ln w="38100">
+              <a:solidFill>
+                <a:schemeClr val="tx1"/>
+              </a:solidFill>
+            </a:ln>
+          </p:spPr>
+          <p:style>
+            <a:lnRef idx="1">
+              <a:schemeClr val="dk1"/>
+            </a:lnRef>
+            <a:fillRef idx="0">
+              <a:schemeClr val="dk1"/>
+            </a:fillRef>
+            <a:effectRef idx="0">
+              <a:schemeClr val="dk1"/>
+            </a:effectRef>
+            <a:fontRef idx="minor">
+              <a:schemeClr val="tx1"/>
+            </a:fontRef>
+          </p:style>
+        </p:cxnSp>
+        <p:cxnSp>
+          <p:nvCxnSpPr>
+            <p:cNvPr id="38" name="Straight Connector 37">
+              <a:extLst>
+                <a:ext uri="{FF2B5EF4-FFF2-40B4-BE49-F238E27FC236}">
+                  <a16:creationId xmlns:a16="http://schemas.microsoft.com/office/drawing/2014/main" id="{5FDD2170-47B2-14E6-3A2A-6F788F6E9BB8}"/>
+                </a:ext>
+              </a:extLst>
+            </p:cNvPr>
+            <p:cNvCxnSpPr>
+              <a:cxnSpLocks/>
+            </p:cNvCxnSpPr>
+            <p:nvPr/>
+          </p:nvCxnSpPr>
+          <p:spPr>
+            <a:xfrm flipV="1">
+              <a:off x="4719969" y="3419359"/>
+              <a:ext cx="2196646" cy="353230"/>
+            </a:xfrm>
+            <a:prstGeom prst="bentConnector3">
+              <a:avLst>
+                <a:gd name="adj1" fmla="val 62191"/>
+              </a:avLst>
+            </a:prstGeom>
+            <a:ln w="38100">
+              <a:solidFill>
+                <a:schemeClr val="tx1"/>
+              </a:solidFill>
+            </a:ln>
+          </p:spPr>
+          <p:style>
+            <a:lnRef idx="1">
+              <a:schemeClr val="dk1"/>
+            </a:lnRef>
+            <a:fillRef idx="0">
+              <a:schemeClr val="dk1"/>
+            </a:fillRef>
+            <a:effectRef idx="0">
+              <a:schemeClr val="dk1"/>
+            </a:effectRef>
+            <a:fontRef idx="minor">
+              <a:schemeClr val="tx1"/>
+            </a:fontRef>
+          </p:style>
+        </p:cxnSp>
+        <p:pic>
+          <p:nvPicPr>
+            <p:cNvPr id="42" name="Picture 41">
+              <a:extLst>
+                <a:ext uri="{FF2B5EF4-FFF2-40B4-BE49-F238E27FC236}">
+                  <a16:creationId xmlns:a16="http://schemas.microsoft.com/office/drawing/2014/main" id="{8A5C5ED1-86E0-D743-719D-41A77EBFF414}"/>
+                </a:ext>
+              </a:extLst>
+            </p:cNvPr>
+            <p:cNvPicPr>
+              <a:picLocks noChangeAspect="1"/>
+            </p:cNvPicPr>
+            <p:nvPr/>
+          </p:nvPicPr>
+          <p:blipFill>
+            <a:blip r:embed="rId8">
+              <a:extLst>
+                <a:ext uri="{28A0092B-C50C-407E-A947-70E740481C1C}">
+                  <a14:useLocalDpi xmlns:a14="http://schemas.microsoft.com/office/drawing/2010/main" val="0"/>
+                </a:ext>
+              </a:extLst>
+            </a:blip>
+            <a:srcRect l="27792" t="20693" r="28034" b="28320"/>
+            <a:stretch/>
+          </p:blipFill>
+          <p:spPr>
+            <a:xfrm>
+              <a:off x="3632394" y="1982874"/>
+              <a:ext cx="627083" cy="723804"/>
+            </a:xfrm>
+            <a:prstGeom prst="rect">
+              <a:avLst/>
+            </a:prstGeom>
+          </p:spPr>
+        </p:pic>
+        <p:pic>
+          <p:nvPicPr>
+            <p:cNvPr id="43" name="Picture 42">
+              <a:extLst>
+                <a:ext uri="{FF2B5EF4-FFF2-40B4-BE49-F238E27FC236}">
+                  <a16:creationId xmlns:a16="http://schemas.microsoft.com/office/drawing/2014/main" id="{1F273FEF-68DE-1DC4-6BFC-49AFD05927EE}"/>
+                </a:ext>
+              </a:extLst>
+            </p:cNvPr>
+            <p:cNvPicPr>
+              <a:picLocks noChangeAspect="1"/>
+            </p:cNvPicPr>
+            <p:nvPr/>
+          </p:nvPicPr>
+          <p:blipFill>
+            <a:blip r:embed="rId8">
+              <a:extLst>
+                <a:ext uri="{28A0092B-C50C-407E-A947-70E740481C1C}">
+                  <a14:useLocalDpi xmlns:a14="http://schemas.microsoft.com/office/drawing/2010/main" val="0"/>
+                </a:ext>
+              </a:extLst>
+            </a:blip>
+            <a:srcRect l="27792" t="20693" r="28034" b="28320"/>
+            <a:stretch/>
+          </p:blipFill>
+          <p:spPr>
+            <a:xfrm>
+              <a:off x="8681175" y="3482980"/>
+              <a:ext cx="627083" cy="723804"/>
+            </a:xfrm>
+            <a:prstGeom prst="rect">
+              <a:avLst/>
+            </a:prstGeom>
+          </p:spPr>
+        </p:pic>
+        <p:pic>
+          <p:nvPicPr>
+            <p:cNvPr id="47" name="Picture 46">
+              <a:extLst>
+                <a:ext uri="{FF2B5EF4-FFF2-40B4-BE49-F238E27FC236}">
+                  <a16:creationId xmlns:a16="http://schemas.microsoft.com/office/drawing/2014/main" id="{88D1D3B2-63A4-B052-1D15-8666858AACDB}"/>
+                </a:ext>
+              </a:extLst>
+            </p:cNvPr>
+            <p:cNvPicPr>
+              <a:picLocks noChangeAspect="1"/>
+            </p:cNvPicPr>
+            <p:nvPr/>
+          </p:nvPicPr>
+          <p:blipFill>
+            <a:blip r:embed="rId8">
+              <a:extLst>
+                <a:ext uri="{28A0092B-C50C-407E-A947-70E740481C1C}">
+                  <a14:useLocalDpi xmlns:a14="http://schemas.microsoft.com/office/drawing/2010/main" val="0"/>
+                </a:ext>
+              </a:extLst>
+            </a:blip>
+            <a:srcRect l="27792" t="20693" r="28034" b="28320"/>
+            <a:stretch/>
+          </p:blipFill>
+          <p:spPr>
+            <a:xfrm>
+              <a:off x="6549984" y="3527377"/>
+              <a:ext cx="627083" cy="723804"/>
+            </a:xfrm>
+            <a:prstGeom prst="rect">
+              <a:avLst/>
+            </a:prstGeom>
+          </p:spPr>
+        </p:pic>
+        <p:cxnSp>
+          <p:nvCxnSpPr>
+            <p:cNvPr id="48" name="Straight Connector 47">
+              <a:extLst>
+                <a:ext uri="{FF2B5EF4-FFF2-40B4-BE49-F238E27FC236}">
+                  <a16:creationId xmlns:a16="http://schemas.microsoft.com/office/drawing/2014/main" id="{04859F87-BE0D-DB45-7A2F-CE2E0819F1FC}"/>
+                </a:ext>
+              </a:extLst>
+            </p:cNvPr>
+            <p:cNvCxnSpPr>
+              <a:cxnSpLocks/>
+            </p:cNvCxnSpPr>
+            <p:nvPr/>
+          </p:nvCxnSpPr>
+          <p:spPr>
+            <a:xfrm>
+              <a:off x="3649170" y="2008595"/>
+              <a:ext cx="311285" cy="0"/>
+            </a:xfrm>
+            <a:prstGeom prst="line">
+              <a:avLst/>
+            </a:prstGeom>
+            <a:ln w="38100">
+              <a:solidFill>
+                <a:schemeClr val="tx1"/>
+              </a:solidFill>
+            </a:ln>
+          </p:spPr>
+          <p:style>
+            <a:lnRef idx="1">
+              <a:schemeClr val="dk1"/>
+            </a:lnRef>
+            <a:fillRef idx="0">
+              <a:schemeClr val="dk1"/>
+            </a:fillRef>
+            <a:effectRef idx="0">
+              <a:schemeClr val="dk1"/>
+            </a:effectRef>
+            <a:fontRef idx="minor">
+              <a:schemeClr val="tx1"/>
+            </a:fontRef>
+          </p:style>
+        </p:cxnSp>
+        <p:sp>
+          <p:nvSpPr>
+            <p:cNvPr id="51" name="Oval 50">
+              <a:extLst>
+                <a:ext uri="{FF2B5EF4-FFF2-40B4-BE49-F238E27FC236}">
+                  <a16:creationId xmlns:a16="http://schemas.microsoft.com/office/drawing/2014/main" id="{4F71865A-EB23-C82C-A4B7-C8FEB79B4E03}"/>
+                </a:ext>
+              </a:extLst>
+            </p:cNvPr>
+            <p:cNvSpPr/>
+            <p:nvPr/>
+          </p:nvSpPr>
+          <p:spPr>
+            <a:xfrm>
+              <a:off x="8961904" y="3482980"/>
+              <a:ext cx="66686" cy="66407"/>
+            </a:xfrm>
+            <a:prstGeom prst="ellipse">
+              <a:avLst/>
+            </a:prstGeom>
+          </p:spPr>
+          <p:style>
+            <a:lnRef idx="2">
+              <a:schemeClr val="dk1">
+                <a:shade val="15000"/>
+              </a:schemeClr>
+            </a:lnRef>
+            <a:fillRef idx="1">
+              <a:schemeClr val="dk1"/>
+            </a:fillRef>
+            <a:effectRef idx="0">
+              <a:schemeClr val="dk1"/>
+            </a:effectRef>
+            <a:fontRef idx="minor">
+              <a:schemeClr val="lt1"/>
+            </a:fontRef>
+          </p:style>
+          <p:txBody>
+            <a:bodyPr rtlCol="0" anchor="ctr"/>
+            <a:lstStyle/>
+            <a:p>
+              <a:pPr algn="ctr"/>
+              <a:endParaRPr lang="en-US" dirty="0"/>
+            </a:p>
+          </p:txBody>
+        </p:sp>
+        <p:sp>
+          <p:nvSpPr>
+            <p:cNvPr id="52" name="Oval 51">
+              <a:extLst>
+                <a:ext uri="{FF2B5EF4-FFF2-40B4-BE49-F238E27FC236}">
+                  <a16:creationId xmlns:a16="http://schemas.microsoft.com/office/drawing/2014/main" id="{CE938F08-2BD1-73D9-5D10-F7C2A30DDF0E}"/>
+                </a:ext>
+              </a:extLst>
+            </p:cNvPr>
+            <p:cNvSpPr/>
+            <p:nvPr/>
+          </p:nvSpPr>
+          <p:spPr>
+            <a:xfrm>
+              <a:off x="6888519" y="3390051"/>
+              <a:ext cx="66686" cy="66407"/>
+            </a:xfrm>
+            <a:prstGeom prst="ellipse">
+              <a:avLst/>
+            </a:prstGeom>
+          </p:spPr>
+          <p:style>
+            <a:lnRef idx="2">
+              <a:schemeClr val="dk1">
+                <a:shade val="15000"/>
+              </a:schemeClr>
+            </a:lnRef>
+            <a:fillRef idx="1">
+              <a:schemeClr val="dk1"/>
+            </a:fillRef>
+            <a:effectRef idx="0">
+              <a:schemeClr val="dk1"/>
+            </a:effectRef>
+            <a:fontRef idx="minor">
+              <a:schemeClr val="lt1"/>
+            </a:fontRef>
+          </p:style>
+          <p:txBody>
+            <a:bodyPr rtlCol="0" anchor="ctr"/>
+            <a:lstStyle/>
+            <a:p>
+              <a:pPr algn="ctr"/>
+              <a:endParaRPr lang="en-US"/>
+            </a:p>
+          </p:txBody>
+        </p:sp>
+        <p:sp>
+          <p:nvSpPr>
+            <p:cNvPr id="53" name="Oval 52">
+              <a:extLst>
+                <a:ext uri="{FF2B5EF4-FFF2-40B4-BE49-F238E27FC236}">
+                  <a16:creationId xmlns:a16="http://schemas.microsoft.com/office/drawing/2014/main" id="{BB469F50-D097-E000-C5B8-62E4292DFFEC}"/>
+                </a:ext>
+              </a:extLst>
+            </p:cNvPr>
+            <p:cNvSpPr/>
+            <p:nvPr/>
+          </p:nvSpPr>
+          <p:spPr>
+            <a:xfrm>
+              <a:off x="4698461" y="3739385"/>
+              <a:ext cx="66686" cy="66407"/>
+            </a:xfrm>
+            <a:prstGeom prst="ellipse">
+              <a:avLst/>
+            </a:prstGeom>
+          </p:spPr>
+          <p:style>
+            <a:lnRef idx="2">
+              <a:schemeClr val="dk1">
+                <a:shade val="15000"/>
+              </a:schemeClr>
+            </a:lnRef>
+            <a:fillRef idx="1">
+              <a:schemeClr val="dk1"/>
+            </a:fillRef>
+            <a:effectRef idx="0">
+              <a:schemeClr val="dk1"/>
+            </a:effectRef>
+            <a:fontRef idx="minor">
+              <a:schemeClr val="lt1"/>
+            </a:fontRef>
+          </p:style>
+          <p:txBody>
+            <a:bodyPr rtlCol="0" anchor="ctr"/>
+            <a:lstStyle/>
+            <a:p>
+              <a:pPr algn="ctr"/>
+              <a:endParaRPr lang="en-US"/>
+            </a:p>
+          </p:txBody>
+        </p:sp>
+        <p:sp>
+          <p:nvSpPr>
+            <p:cNvPr id="54" name="Oval 53">
+              <a:extLst>
+                <a:ext uri="{FF2B5EF4-FFF2-40B4-BE49-F238E27FC236}">
+                  <a16:creationId xmlns:a16="http://schemas.microsoft.com/office/drawing/2014/main" id="{FE4C98FA-7490-6262-B6F6-A5DAC14BC3AC}"/>
+                </a:ext>
+              </a:extLst>
+            </p:cNvPr>
+            <p:cNvSpPr/>
+            <p:nvPr/>
+          </p:nvSpPr>
+          <p:spPr>
+            <a:xfrm>
+              <a:off x="4686626" y="2997769"/>
+              <a:ext cx="66686" cy="66407"/>
+            </a:xfrm>
+            <a:prstGeom prst="ellipse">
+              <a:avLst/>
+            </a:prstGeom>
+          </p:spPr>
+          <p:style>
+            <a:lnRef idx="2">
+              <a:schemeClr val="dk1">
+                <a:shade val="15000"/>
+              </a:schemeClr>
+            </a:lnRef>
+            <a:fillRef idx="1">
+              <a:schemeClr val="dk1"/>
+            </a:fillRef>
+            <a:effectRef idx="0">
+              <a:schemeClr val="dk1"/>
+            </a:effectRef>
+            <a:fontRef idx="minor">
+              <a:schemeClr val="lt1"/>
+            </a:fontRef>
+          </p:style>
+          <p:txBody>
+            <a:bodyPr rtlCol="0" anchor="ctr"/>
+            <a:lstStyle/>
+            <a:p>
+              <a:pPr algn="ctr"/>
+              <a:endParaRPr lang="en-US" dirty="0"/>
+            </a:p>
+          </p:txBody>
+        </p:sp>
+        <p:sp>
+          <p:nvSpPr>
+            <p:cNvPr id="55" name="Oval 54">
+              <a:extLst>
+                <a:ext uri="{FF2B5EF4-FFF2-40B4-BE49-F238E27FC236}">
+                  <a16:creationId xmlns:a16="http://schemas.microsoft.com/office/drawing/2014/main" id="{681CA9D7-60A5-803D-4AED-6D6B51286F76}"/>
+                </a:ext>
+              </a:extLst>
+            </p:cNvPr>
+            <p:cNvSpPr/>
+            <p:nvPr/>
+          </p:nvSpPr>
+          <p:spPr>
+            <a:xfrm>
+              <a:off x="4768235" y="1676607"/>
+              <a:ext cx="66686" cy="66407"/>
+            </a:xfrm>
+            <a:prstGeom prst="ellipse">
+              <a:avLst/>
+            </a:prstGeom>
+          </p:spPr>
+          <p:style>
+            <a:lnRef idx="2">
+              <a:schemeClr val="dk1">
+                <a:shade val="15000"/>
+              </a:schemeClr>
+            </a:lnRef>
+            <a:fillRef idx="1">
+              <a:schemeClr val="dk1"/>
+            </a:fillRef>
+            <a:effectRef idx="0">
+              <a:schemeClr val="dk1"/>
+            </a:effectRef>
+            <a:fontRef idx="minor">
+              <a:schemeClr val="lt1"/>
+            </a:fontRef>
+          </p:style>
+          <p:txBody>
+            <a:bodyPr rtlCol="0" anchor="ctr"/>
+            <a:lstStyle/>
+            <a:p>
+              <a:pPr algn="ctr"/>
+              <a:endParaRPr lang="en-US"/>
+            </a:p>
+          </p:txBody>
+        </p:sp>
+        <p:sp>
+          <p:nvSpPr>
+            <p:cNvPr id="56" name="Oval 55">
+              <a:extLst>
+                <a:ext uri="{FF2B5EF4-FFF2-40B4-BE49-F238E27FC236}">
+                  <a16:creationId xmlns:a16="http://schemas.microsoft.com/office/drawing/2014/main" id="{FF57D6FC-AA6A-B1FF-5E77-C55695A944DC}"/>
+                </a:ext>
+              </a:extLst>
+            </p:cNvPr>
+            <p:cNvSpPr/>
+            <p:nvPr/>
+          </p:nvSpPr>
+          <p:spPr>
+            <a:xfrm>
+              <a:off x="6835881" y="3521630"/>
+              <a:ext cx="66686" cy="66407"/>
+            </a:xfrm>
+            <a:prstGeom prst="ellipse">
+              <a:avLst/>
+            </a:prstGeom>
+          </p:spPr>
+          <p:style>
+            <a:lnRef idx="2">
+              <a:schemeClr val="dk1">
+                <a:shade val="15000"/>
+              </a:schemeClr>
+            </a:lnRef>
+            <a:fillRef idx="1">
+              <a:schemeClr val="dk1"/>
+            </a:fillRef>
+            <a:effectRef idx="0">
+              <a:schemeClr val="dk1"/>
+            </a:effectRef>
+            <a:fontRef idx="minor">
+              <a:schemeClr val="lt1"/>
+            </a:fontRef>
+          </p:style>
+          <p:txBody>
+            <a:bodyPr rtlCol="0" anchor="ctr"/>
+            <a:lstStyle/>
+            <a:p>
+              <a:pPr algn="ctr"/>
+              <a:endParaRPr lang="en-US"/>
+            </a:p>
+          </p:txBody>
+        </p:sp>
+        <p:sp>
+          <p:nvSpPr>
+            <p:cNvPr id="57" name="Oval 56">
+              <a:extLst>
+                <a:ext uri="{FF2B5EF4-FFF2-40B4-BE49-F238E27FC236}">
+                  <a16:creationId xmlns:a16="http://schemas.microsoft.com/office/drawing/2014/main" id="{7FB80262-A252-A3EA-F71D-F9B0FA2D30FD}"/>
+                </a:ext>
+              </a:extLst>
+            </p:cNvPr>
+            <p:cNvSpPr/>
+            <p:nvPr/>
+          </p:nvSpPr>
+          <p:spPr>
+            <a:xfrm>
+              <a:off x="7012853" y="3395796"/>
+              <a:ext cx="66686" cy="66407"/>
+            </a:xfrm>
+            <a:prstGeom prst="ellipse">
+              <a:avLst/>
+            </a:prstGeom>
+          </p:spPr>
+          <p:style>
+            <a:lnRef idx="2">
+              <a:schemeClr val="dk1">
+                <a:shade val="15000"/>
+              </a:schemeClr>
+            </a:lnRef>
+            <a:fillRef idx="1">
+              <a:schemeClr val="dk1"/>
+            </a:fillRef>
+            <a:effectRef idx="0">
+              <a:schemeClr val="dk1"/>
+            </a:effectRef>
+            <a:fontRef idx="minor">
+              <a:schemeClr val="lt1"/>
+            </a:fontRef>
+          </p:style>
+          <p:txBody>
+            <a:bodyPr rtlCol="0" anchor="ctr"/>
+            <a:lstStyle/>
+            <a:p>
+              <a:pPr algn="ctr"/>
+              <a:endParaRPr lang="en-US"/>
+            </a:p>
+          </p:txBody>
+        </p:sp>
+        <p:sp>
+          <p:nvSpPr>
+            <p:cNvPr id="58" name="Oval 57">
+              <a:extLst>
+                <a:ext uri="{FF2B5EF4-FFF2-40B4-BE49-F238E27FC236}">
+                  <a16:creationId xmlns:a16="http://schemas.microsoft.com/office/drawing/2014/main" id="{3CAFA3BA-93FA-14B9-7EFD-682BBF5E4E8E}"/>
+                </a:ext>
+              </a:extLst>
+            </p:cNvPr>
+            <p:cNvSpPr/>
+            <p:nvPr/>
+          </p:nvSpPr>
+          <p:spPr>
+            <a:xfrm>
+              <a:off x="8781728" y="3386155"/>
+              <a:ext cx="66686" cy="66407"/>
+            </a:xfrm>
+            <a:prstGeom prst="ellipse">
+              <a:avLst/>
+            </a:prstGeom>
+          </p:spPr>
+          <p:style>
+            <a:lnRef idx="2">
+              <a:schemeClr val="dk1">
+                <a:shade val="15000"/>
+              </a:schemeClr>
+            </a:lnRef>
+            <a:fillRef idx="1">
+              <a:schemeClr val="dk1"/>
+            </a:fillRef>
+            <a:effectRef idx="0">
+              <a:schemeClr val="dk1"/>
+            </a:effectRef>
+            <a:fontRef idx="minor">
+              <a:schemeClr val="lt1"/>
+            </a:fontRef>
+          </p:style>
+          <p:txBody>
+            <a:bodyPr rtlCol="0" anchor="ctr"/>
+            <a:lstStyle/>
+            <a:p>
+              <a:pPr algn="ctr"/>
+              <a:endParaRPr lang="en-US"/>
+            </a:p>
+          </p:txBody>
+        </p:sp>
+        <p:sp>
+          <p:nvSpPr>
+            <p:cNvPr id="59" name="Oval 58">
+              <a:extLst>
+                <a:ext uri="{FF2B5EF4-FFF2-40B4-BE49-F238E27FC236}">
+                  <a16:creationId xmlns:a16="http://schemas.microsoft.com/office/drawing/2014/main" id="{7CC5D51D-2E6A-40D5-C474-5C72286459D6}"/>
+                </a:ext>
+              </a:extLst>
+            </p:cNvPr>
+            <p:cNvSpPr/>
+            <p:nvPr/>
+          </p:nvSpPr>
+          <p:spPr>
+            <a:xfrm>
+              <a:off x="8781728" y="2469834"/>
+              <a:ext cx="66686" cy="66407"/>
+            </a:xfrm>
+            <a:prstGeom prst="ellipse">
+              <a:avLst/>
+            </a:prstGeom>
+          </p:spPr>
+          <p:style>
+            <a:lnRef idx="2">
+              <a:schemeClr val="dk1">
+                <a:shade val="15000"/>
+              </a:schemeClr>
+            </a:lnRef>
+            <a:fillRef idx="1">
+              <a:schemeClr val="dk1"/>
+            </a:fillRef>
+            <a:effectRef idx="0">
+              <a:schemeClr val="dk1"/>
+            </a:effectRef>
+            <a:fontRef idx="minor">
+              <a:schemeClr val="lt1"/>
+            </a:fontRef>
+          </p:style>
+          <p:txBody>
+            <a:bodyPr rtlCol="0" anchor="ctr"/>
+            <a:lstStyle/>
+            <a:p>
+              <a:pPr algn="ctr"/>
+              <a:endParaRPr lang="en-US" dirty="0"/>
+            </a:p>
+          </p:txBody>
+        </p:sp>
+        <p:sp>
+          <p:nvSpPr>
+            <p:cNvPr id="60" name="Oval 59">
+              <a:extLst>
+                <a:ext uri="{FF2B5EF4-FFF2-40B4-BE49-F238E27FC236}">
+                  <a16:creationId xmlns:a16="http://schemas.microsoft.com/office/drawing/2014/main" id="{39E4C4D7-2722-1764-5202-19359374A30C}"/>
+                </a:ext>
+              </a:extLst>
+            </p:cNvPr>
+            <p:cNvSpPr/>
+            <p:nvPr/>
+          </p:nvSpPr>
+          <p:spPr>
+            <a:xfrm>
+              <a:off x="8781727" y="1676606"/>
+              <a:ext cx="66686" cy="66407"/>
+            </a:xfrm>
+            <a:prstGeom prst="ellipse">
+              <a:avLst/>
+            </a:prstGeom>
+          </p:spPr>
+          <p:style>
+            <a:lnRef idx="2">
+              <a:schemeClr val="dk1">
+                <a:shade val="15000"/>
+              </a:schemeClr>
+            </a:lnRef>
+            <a:fillRef idx="1">
+              <a:schemeClr val="dk1"/>
+            </a:fillRef>
+            <a:effectRef idx="0">
+              <a:schemeClr val="dk1"/>
+            </a:effectRef>
+            <a:fontRef idx="minor">
+              <a:schemeClr val="lt1"/>
+            </a:fontRef>
+          </p:style>
+          <p:txBody>
+            <a:bodyPr rtlCol="0" anchor="ctr"/>
+            <a:lstStyle/>
+            <a:p>
+              <a:pPr algn="ctr"/>
+              <a:endParaRPr lang="en-US" dirty="0"/>
+            </a:p>
+          </p:txBody>
+        </p:sp>
+      </p:grpSp>
+      <p:sp>
+        <p:nvSpPr>
+          <p:cNvPr id="62" name="Oval 61">
+            <a:extLst>
+              <a:ext uri="{FF2B5EF4-FFF2-40B4-BE49-F238E27FC236}">
+                <a16:creationId xmlns:a16="http://schemas.microsoft.com/office/drawing/2014/main" id="{DBC6A69A-38E5-FA0B-A8F6-07B31E7E3999}"/>
+              </a:ext>
+            </a:extLst>
+          </p:cNvPr>
+          <p:cNvSpPr/>
+          <p:nvPr/>
+        </p:nvSpPr>
+        <p:spPr>
+          <a:xfrm>
+            <a:off x="4001493" y="2389053"/>
+            <a:ext cx="79402" cy="94968"/>
+          </a:xfrm>
+          <a:prstGeom prst="ellipse">
+            <a:avLst/>
+          </a:prstGeom>
+        </p:spPr>
+        <p:style>
+          <a:lnRef idx="2">
+            <a:schemeClr val="dk1">
+              <a:shade val="15000"/>
+            </a:schemeClr>
+          </a:lnRef>
+          <a:fillRef idx="1">
+            <a:schemeClr val="dk1"/>
+          </a:fillRef>
+          <a:effectRef idx="0">
+            <a:schemeClr val="dk1"/>
+          </a:effectRef>
+          <a:fontRef idx="minor">
+            <a:schemeClr val="lt1"/>
+          </a:fontRef>
+        </p:style>
+        <p:txBody>
+          <a:bodyPr rtlCol="0" anchor="ctr"/>
+          <a:lstStyle/>
+          <a:p>
+            <a:pPr algn="ctr"/>
+            <a:endParaRPr lang="en-US" dirty="0"/>
+          </a:p>
+        </p:txBody>
+      </p:sp>
+      <p:sp>
+        <p:nvSpPr>
+          <p:cNvPr id="2" name="TextBox 1">
+            <a:extLst>
+              <a:ext uri="{FF2B5EF4-FFF2-40B4-BE49-F238E27FC236}">
+                <a16:creationId xmlns:a16="http://schemas.microsoft.com/office/drawing/2014/main" id="{A4965A85-5451-796D-C0A7-DCAB0A870659}"/>
+              </a:ext>
+            </a:extLst>
+          </p:cNvPr>
+          <p:cNvSpPr txBox="1"/>
+          <p:nvPr/>
+        </p:nvSpPr>
+        <p:spPr>
+          <a:xfrm>
+            <a:off x="6089425" y="2402653"/>
+            <a:ext cx="530915" cy="276999"/>
+          </a:xfrm>
+          <a:prstGeom prst="rect">
+            <a:avLst/>
+          </a:prstGeom>
+          <a:noFill/>
+        </p:spPr>
+        <p:txBody>
+          <a:bodyPr wrap="none" rtlCol="0">
+            <a:spAutoFit/>
+          </a:bodyPr>
+          <a:lstStyle/>
+          <a:p>
+            <a:r>
+              <a:rPr lang="en-US" sz="1200" dirty="0">
+                <a:solidFill>
+                  <a:srgbClr val="2985FD"/>
+                </a:solidFill>
+                <a:latin typeface="Berlin Sans FB" panose="020E0602020502020306" pitchFamily="34" charset="0"/>
+              </a:rPr>
+              <a:t>E B C</a:t>
+            </a:r>
+          </a:p>
+        </p:txBody>
+      </p:sp>
+      <p:sp>
+        <p:nvSpPr>
+          <p:cNvPr id="4" name="TextBox 3">
+            <a:extLst>
+              <a:ext uri="{FF2B5EF4-FFF2-40B4-BE49-F238E27FC236}">
+                <a16:creationId xmlns:a16="http://schemas.microsoft.com/office/drawing/2014/main" id="{1A9AA877-1876-1D96-59A7-F427608B33E6}"/>
+              </a:ext>
+            </a:extLst>
+          </p:cNvPr>
+          <p:cNvSpPr txBox="1"/>
+          <p:nvPr/>
+        </p:nvSpPr>
+        <p:spPr>
+          <a:xfrm>
+            <a:off x="4103089" y="177729"/>
+            <a:ext cx="2919389" cy="369332"/>
+          </a:xfrm>
+          <a:prstGeom prst="rect">
+            <a:avLst/>
+          </a:prstGeom>
+          <a:noFill/>
+        </p:spPr>
+        <p:txBody>
+          <a:bodyPr wrap="none" rtlCol="0">
+            <a:spAutoFit/>
+          </a:bodyPr>
+          <a:lstStyle/>
+          <a:p>
+            <a:r>
+              <a:rPr lang="en-US" dirty="0">
+                <a:latin typeface="Bahnschrift SemiBold" panose="020B0502040204020203" pitchFamily="34" charset="0"/>
+              </a:rPr>
+              <a:t>TTL NOT GATE / INVERTER</a:t>
+            </a:r>
+          </a:p>
+        </p:txBody>
+      </p:sp>
+      <p:sp>
+        <p:nvSpPr>
+          <p:cNvPr id="5" name="TextBox 4">
+            <a:extLst>
+              <a:ext uri="{FF2B5EF4-FFF2-40B4-BE49-F238E27FC236}">
+                <a16:creationId xmlns:a16="http://schemas.microsoft.com/office/drawing/2014/main" id="{80B021EE-F3D5-69DA-8D09-05B36CD10748}"/>
+              </a:ext>
+            </a:extLst>
+          </p:cNvPr>
+          <p:cNvSpPr txBox="1"/>
+          <p:nvPr/>
+        </p:nvSpPr>
+        <p:spPr>
+          <a:xfrm>
+            <a:off x="10952558" y="23118"/>
+            <a:ext cx="1239442" cy="369332"/>
+          </a:xfrm>
+          <a:prstGeom prst="rect">
+            <a:avLst/>
+          </a:prstGeom>
+          <a:noFill/>
+        </p:spPr>
+        <p:txBody>
+          <a:bodyPr wrap="none" rtlCol="0">
+            <a:spAutoFit/>
+          </a:bodyPr>
+          <a:lstStyle/>
+          <a:p>
+            <a:r>
+              <a:rPr lang="en-US" dirty="0">
+                <a:latin typeface="Bahnschrift SemiBold" panose="020B0502040204020203" pitchFamily="34" charset="0"/>
+              </a:rPr>
+              <a:t>Buda Tech</a:t>
+            </a:r>
+          </a:p>
+        </p:txBody>
+      </p:sp>
+      <p:graphicFrame>
+        <p:nvGraphicFramePr>
+          <p:cNvPr id="6" name="Table 5">
+            <a:extLst>
+              <a:ext uri="{FF2B5EF4-FFF2-40B4-BE49-F238E27FC236}">
+                <a16:creationId xmlns:a16="http://schemas.microsoft.com/office/drawing/2014/main" id="{C5D6150C-06F6-E1F0-CDDF-1D5A151186C3}"/>
+              </a:ext>
+            </a:extLst>
+          </p:cNvPr>
+          <p:cNvGraphicFramePr>
+            <a:graphicFrameLocks noGrp="1"/>
+          </p:cNvGraphicFramePr>
+          <p:nvPr>
+            <p:extLst>
+              <p:ext uri="{D42A27DB-BD31-4B8C-83A1-F6EECF244321}">
+                <p14:modId xmlns:p14="http://schemas.microsoft.com/office/powerpoint/2010/main" val="245064897"/>
+              </p:ext>
+            </p:extLst>
+          </p:nvPr>
+        </p:nvGraphicFramePr>
+        <p:xfrm>
+          <a:off x="439563" y="2713304"/>
+          <a:ext cx="2615530" cy="1546668"/>
+        </p:xfrm>
+        <a:graphic>
+          <a:graphicData uri="http://schemas.openxmlformats.org/drawingml/2006/table">
+            <a:tbl>
+              <a:tblPr firstRow="1" bandRow="1">
+                <a:tableStyleId>{2D5ABB26-0587-4C30-8999-92F81FD0307C}</a:tableStyleId>
+              </a:tblPr>
+              <a:tblGrid>
+                <a:gridCol w="1307765">
+                  <a:extLst>
+                    <a:ext uri="{9D8B030D-6E8A-4147-A177-3AD203B41FA5}">
+                      <a16:colId xmlns:a16="http://schemas.microsoft.com/office/drawing/2014/main" val="1704234504"/>
+                    </a:ext>
+                  </a:extLst>
+                </a:gridCol>
+                <a:gridCol w="1307765">
+                  <a:extLst>
+                    <a:ext uri="{9D8B030D-6E8A-4147-A177-3AD203B41FA5}">
+                      <a16:colId xmlns:a16="http://schemas.microsoft.com/office/drawing/2014/main" val="1802361338"/>
+                    </a:ext>
+                  </a:extLst>
+                </a:gridCol>
+              </a:tblGrid>
+              <a:tr h="515556">
+                <a:tc>
+                  <a:txBody>
+                    <a:bodyPr/>
+                    <a:lstStyle/>
+                    <a:p>
+                      <a:r>
+                        <a:rPr lang="en-US" dirty="0">
+                          <a:latin typeface="Bahnschrift SemiBold" panose="020B0502040204020203" pitchFamily="34" charset="0"/>
+                        </a:rPr>
+                        <a:t>SWITCH</a:t>
+                      </a:r>
+                    </a:p>
+                  </a:txBody>
+                  <a:tcPr/>
+                </a:tc>
+                <a:tc>
+                  <a:txBody>
+                    <a:bodyPr/>
+                    <a:lstStyle/>
+                    <a:p>
+                      <a:r>
+                        <a:rPr lang="en-US" dirty="0">
+                          <a:latin typeface="Bahnschrift SemiBold" panose="020B0502040204020203" pitchFamily="34" charset="0"/>
+                        </a:rPr>
+                        <a:t>LED</a:t>
+                      </a:r>
+                    </a:p>
+                  </a:txBody>
+                  <a:tcPr/>
+                </a:tc>
+                <a:extLst>
+                  <a:ext uri="{0D108BD9-81ED-4DB2-BD59-A6C34878D82A}">
+                    <a16:rowId xmlns:a16="http://schemas.microsoft.com/office/drawing/2014/main" val="396664019"/>
+                  </a:ext>
+                </a:extLst>
+              </a:tr>
+              <a:tr h="515556">
+                <a:tc>
+                  <a:txBody>
+                    <a:bodyPr/>
+                    <a:lstStyle/>
+                    <a:p>
+                      <a:r>
+                        <a:rPr lang="en-US" dirty="0">
+                          <a:latin typeface="Bahnschrift SemiBold" panose="020B0502040204020203" pitchFamily="34" charset="0"/>
+                        </a:rPr>
+                        <a:t>   0</a:t>
+                      </a:r>
+                    </a:p>
+                  </a:txBody>
+                  <a:tcPr/>
+                </a:tc>
+                <a:tc>
+                  <a:txBody>
+                    <a:bodyPr/>
+                    <a:lstStyle/>
+                    <a:p>
+                      <a:r>
+                        <a:rPr lang="en-US" dirty="0">
+                          <a:latin typeface="Bahnschrift SemiBold" panose="020B0502040204020203" pitchFamily="34" charset="0"/>
+                        </a:rPr>
+                        <a:t>   1</a:t>
+                      </a:r>
+                    </a:p>
+                  </a:txBody>
+                  <a:tcPr/>
+                </a:tc>
+                <a:extLst>
+                  <a:ext uri="{0D108BD9-81ED-4DB2-BD59-A6C34878D82A}">
+                    <a16:rowId xmlns:a16="http://schemas.microsoft.com/office/drawing/2014/main" val="1747074417"/>
+                  </a:ext>
+                </a:extLst>
+              </a:tr>
+              <a:tr h="515556">
+                <a:tc>
+                  <a:txBody>
+                    <a:bodyPr/>
+                    <a:lstStyle/>
+                    <a:p>
+                      <a:r>
+                        <a:rPr lang="en-US" dirty="0">
+                          <a:latin typeface="Bahnschrift SemiBold" panose="020B0502040204020203" pitchFamily="34" charset="0"/>
+                        </a:rPr>
+                        <a:t>   1</a:t>
+                      </a:r>
+                    </a:p>
+                  </a:txBody>
+                  <a:tcPr/>
+                </a:tc>
+                <a:tc>
+                  <a:txBody>
+                    <a:bodyPr/>
+                    <a:lstStyle/>
+                    <a:p>
+                      <a:r>
+                        <a:rPr lang="en-US" dirty="0">
+                          <a:latin typeface="Bahnschrift SemiBold" panose="020B0502040204020203" pitchFamily="34" charset="0"/>
+                        </a:rPr>
+                        <a:t>   0</a:t>
+                      </a:r>
+                    </a:p>
+                  </a:txBody>
+                  <a:tcPr/>
+                </a:tc>
+                <a:extLst>
+                  <a:ext uri="{0D108BD9-81ED-4DB2-BD59-A6C34878D82A}">
+                    <a16:rowId xmlns:a16="http://schemas.microsoft.com/office/drawing/2014/main" val="547591735"/>
+                  </a:ext>
+                </a:extLst>
+              </a:tr>
+            </a:tbl>
+          </a:graphicData>
+        </a:graphic>
+      </p:graphicFrame>
+      <p:sp>
+        <p:nvSpPr>
+          <p:cNvPr id="9" name="TextBox 8">
+            <a:extLst>
+              <a:ext uri="{FF2B5EF4-FFF2-40B4-BE49-F238E27FC236}">
+                <a16:creationId xmlns:a16="http://schemas.microsoft.com/office/drawing/2014/main" id="{56C07F4A-60A7-0E21-11E3-D7422F1514AE}"/>
+              </a:ext>
+            </a:extLst>
+          </p:cNvPr>
+          <p:cNvSpPr txBox="1"/>
+          <p:nvPr/>
+        </p:nvSpPr>
+        <p:spPr>
+          <a:xfrm>
+            <a:off x="8917198" y="1473060"/>
+            <a:ext cx="479618" cy="307777"/>
+          </a:xfrm>
+          <a:prstGeom prst="rect">
+            <a:avLst/>
+          </a:prstGeom>
+          <a:noFill/>
+        </p:spPr>
+        <p:txBody>
+          <a:bodyPr wrap="none" rtlCol="0">
+            <a:spAutoFit/>
+          </a:bodyPr>
+          <a:lstStyle/>
+          <a:p>
+            <a:r>
+              <a:rPr lang="en-US" sz="1400" dirty="0">
+                <a:solidFill>
+                  <a:srgbClr val="2985FD"/>
+                </a:solidFill>
+                <a:latin typeface="Berlin Sans FB Demi" panose="020E0802020502020306" pitchFamily="34" charset="0"/>
+              </a:rPr>
+              <a:t>1K</a:t>
+            </a:r>
+            <a:r>
+              <a:rPr lang="el-GR" sz="1400" dirty="0">
+                <a:solidFill>
+                  <a:srgbClr val="2985FD"/>
+                </a:solidFill>
+                <a:latin typeface="Calibri" panose="020F0502020204030204" pitchFamily="34" charset="0"/>
+                <a:cs typeface="Calibri" panose="020F0502020204030204" pitchFamily="34" charset="0"/>
+              </a:rPr>
+              <a:t>Ώ</a:t>
+            </a:r>
+            <a:endParaRPr lang="en-US" sz="1400" dirty="0">
+              <a:solidFill>
+                <a:srgbClr val="2985FD"/>
+              </a:solidFill>
+              <a:latin typeface="Berlin Sans FB Demi" panose="020E0802020502020306" pitchFamily="34" charset="0"/>
+            </a:endParaRPr>
+          </a:p>
+        </p:txBody>
+      </p:sp>
+      <p:sp>
+        <p:nvSpPr>
+          <p:cNvPr id="11" name="TextBox 10">
+            <a:extLst>
+              <a:ext uri="{FF2B5EF4-FFF2-40B4-BE49-F238E27FC236}">
+                <a16:creationId xmlns:a16="http://schemas.microsoft.com/office/drawing/2014/main" id="{301063CA-77C8-E2D5-E209-68536855EC2E}"/>
+              </a:ext>
+            </a:extLst>
+          </p:cNvPr>
+          <p:cNvSpPr txBox="1"/>
+          <p:nvPr/>
+        </p:nvSpPr>
+        <p:spPr>
+          <a:xfrm>
+            <a:off x="3436718" y="3346794"/>
+            <a:ext cx="593432" cy="307777"/>
+          </a:xfrm>
+          <a:prstGeom prst="rect">
+            <a:avLst/>
+          </a:prstGeom>
+          <a:noFill/>
+        </p:spPr>
+        <p:txBody>
+          <a:bodyPr wrap="none" rtlCol="0">
+            <a:spAutoFit/>
+          </a:bodyPr>
+          <a:lstStyle/>
+          <a:p>
+            <a:r>
+              <a:rPr lang="en-US" sz="1400" dirty="0">
+                <a:solidFill>
+                  <a:srgbClr val="2985FD"/>
+                </a:solidFill>
+                <a:latin typeface="Berlin Sans FB Demi" panose="020E0802020502020306" pitchFamily="34" charset="0"/>
+              </a:rPr>
+              <a:t>10K</a:t>
+            </a:r>
+            <a:r>
+              <a:rPr lang="el-GR" sz="1400" dirty="0">
+                <a:solidFill>
+                  <a:srgbClr val="2985FD"/>
+                </a:solidFill>
+                <a:latin typeface="Calibri" panose="020F0502020204030204" pitchFamily="34" charset="0"/>
+                <a:cs typeface="Calibri" panose="020F0502020204030204" pitchFamily="34" charset="0"/>
+              </a:rPr>
+              <a:t>Ώ</a:t>
+            </a:r>
+            <a:endParaRPr lang="en-US" sz="1400" dirty="0">
+              <a:solidFill>
+                <a:srgbClr val="2985FD"/>
+              </a:solidFill>
+              <a:latin typeface="Berlin Sans FB Demi" panose="020E0802020502020306" pitchFamily="34" charset="0"/>
+            </a:endParaRPr>
+          </a:p>
+        </p:txBody>
+      </p:sp>
+      <p:sp>
+        <p:nvSpPr>
+          <p:cNvPr id="7" name="TextBox 34">
+            <a:extLst>
+              <a:ext uri="{FF2B5EF4-FFF2-40B4-BE49-F238E27FC236}">
+                <a16:creationId xmlns:a16="http://schemas.microsoft.com/office/drawing/2014/main" id="{C2CE2E93-EF14-3A3D-6EF9-DAFD5BD36789}"/>
+              </a:ext>
+            </a:extLst>
+          </p:cNvPr>
+          <p:cNvSpPr txBox="1"/>
+          <p:nvPr/>
+        </p:nvSpPr>
+        <p:spPr>
+          <a:xfrm>
+            <a:off x="343781" y="4708417"/>
+            <a:ext cx="11491287" cy="2123658"/>
+          </a:xfrm>
+          <a:prstGeom prst="rect">
+            <a:avLst/>
+          </a:prstGeom>
+          <a:noFill/>
+        </p:spPr>
+        <p:txBody>
+          <a:bodyPr wrap="none" rtlCol="0">
+            <a:spAutoFit/>
+          </a:bodyPr>
+          <a:lstStyle>
+            <a:defPPr>
+              <a:defRPr lang="en-US"/>
+            </a:defPPr>
+            <a:lvl1pPr marL="0" algn="l" defTabSz="914400" rtl="0" eaLnBrk="1" latinLnBrk="0" hangingPunct="1">
+              <a:defRPr sz="1800" kern="1200">
+                <a:solidFill>
+                  <a:schemeClr val="tx1"/>
+                </a:solidFill>
+                <a:latin typeface="+mn-lt"/>
+                <a:ea typeface="+mn-ea"/>
+                <a:cs typeface="+mn-cs"/>
+              </a:defRPr>
+            </a:lvl1pPr>
+            <a:lvl2pPr marL="457200" algn="l" defTabSz="914400" rtl="0" eaLnBrk="1" latinLnBrk="0" hangingPunct="1">
+              <a:defRPr sz="1800" kern="1200">
+                <a:solidFill>
+                  <a:schemeClr val="tx1"/>
+                </a:solidFill>
+                <a:latin typeface="+mn-lt"/>
+                <a:ea typeface="+mn-ea"/>
+                <a:cs typeface="+mn-cs"/>
+              </a:defRPr>
+            </a:lvl2pPr>
+            <a:lvl3pPr marL="914400" algn="l" defTabSz="914400" rtl="0" eaLnBrk="1" latinLnBrk="0" hangingPunct="1">
+              <a:defRPr sz="1800" kern="1200">
+                <a:solidFill>
+                  <a:schemeClr val="tx1"/>
+                </a:solidFill>
+                <a:latin typeface="+mn-lt"/>
+                <a:ea typeface="+mn-ea"/>
+                <a:cs typeface="+mn-cs"/>
+              </a:defRPr>
+            </a:lvl3pPr>
+            <a:lvl4pPr marL="1371600" algn="l" defTabSz="914400" rtl="0" eaLnBrk="1" latinLnBrk="0" hangingPunct="1">
+              <a:defRPr sz="1800" kern="1200">
+                <a:solidFill>
+                  <a:schemeClr val="tx1"/>
+                </a:solidFill>
+                <a:latin typeface="+mn-lt"/>
+                <a:ea typeface="+mn-ea"/>
+                <a:cs typeface="+mn-cs"/>
+              </a:defRPr>
+            </a:lvl4pPr>
+            <a:lvl5pPr marL="1828800" algn="l" defTabSz="914400" rtl="0" eaLnBrk="1" latinLnBrk="0" hangingPunct="1">
+              <a:defRPr sz="1800" kern="1200">
+                <a:solidFill>
+                  <a:schemeClr val="tx1"/>
+                </a:solidFill>
+                <a:latin typeface="+mn-lt"/>
+                <a:ea typeface="+mn-ea"/>
+                <a:cs typeface="+mn-cs"/>
+              </a:defRPr>
+            </a:lvl5pPr>
+            <a:lvl6pPr marL="2286000" algn="l" defTabSz="914400" rtl="0" eaLnBrk="1" latinLnBrk="0" hangingPunct="1">
+              <a:defRPr sz="1800" kern="1200">
+                <a:solidFill>
+                  <a:schemeClr val="tx1"/>
+                </a:solidFill>
+                <a:latin typeface="+mn-lt"/>
+                <a:ea typeface="+mn-ea"/>
+                <a:cs typeface="+mn-cs"/>
+              </a:defRPr>
+            </a:lvl6pPr>
+            <a:lvl7pPr marL="2743200" algn="l" defTabSz="914400" rtl="0" eaLnBrk="1" latinLnBrk="0" hangingPunct="1">
+              <a:defRPr sz="1800" kern="1200">
+                <a:solidFill>
+                  <a:schemeClr val="tx1"/>
+                </a:solidFill>
+                <a:latin typeface="+mn-lt"/>
+                <a:ea typeface="+mn-ea"/>
+                <a:cs typeface="+mn-cs"/>
+              </a:defRPr>
+            </a:lvl7pPr>
+            <a:lvl8pPr marL="3200400" algn="l" defTabSz="914400" rtl="0" eaLnBrk="1" latinLnBrk="0" hangingPunct="1">
+              <a:defRPr sz="1800" kern="1200">
+                <a:solidFill>
+                  <a:schemeClr val="tx1"/>
+                </a:solidFill>
+                <a:latin typeface="+mn-lt"/>
+                <a:ea typeface="+mn-ea"/>
+                <a:cs typeface="+mn-cs"/>
+              </a:defRPr>
+            </a:lvl8pPr>
+            <a:lvl9pPr marL="3657600" algn="l" defTabSz="914400" rtl="0" eaLnBrk="1" latinLnBrk="0" hangingPunct="1">
+              <a:defRPr sz="1800" kern="1200">
+                <a:solidFill>
+                  <a:schemeClr val="tx1"/>
+                </a:solidFill>
+                <a:latin typeface="+mn-lt"/>
+                <a:ea typeface="+mn-ea"/>
+                <a:cs typeface="+mn-cs"/>
+              </a:defRPr>
+            </a:lvl9pPr>
+          </a:lstStyle>
+          <a:p>
+            <a:r>
+              <a:rPr lang="en-US" sz="6600" b="1" dirty="0">
+                <a:solidFill>
+                  <a:srgbClr val="FF0000"/>
+                </a:solidFill>
+                <a:latin typeface="Segoe UI" panose="020B0502040204020203" pitchFamily="34" charset="0"/>
+                <a:cs typeface="Segoe UI" panose="020B0502040204020203" pitchFamily="34" charset="0"/>
+              </a:rPr>
+              <a:t>INVERTER/NOT GATE USING</a:t>
+            </a:r>
+          </a:p>
+          <a:p>
+            <a:r>
+              <a:rPr lang="en-US" sz="6600" b="1" dirty="0">
+                <a:solidFill>
+                  <a:srgbClr val="FF0000"/>
+                </a:solidFill>
+                <a:latin typeface="Segoe UI" panose="020B0502040204020203" pitchFamily="34" charset="0"/>
+                <a:cs typeface="Segoe UI" panose="020B0502040204020203" pitchFamily="34" charset="0"/>
+              </a:rPr>
+              <a:t>BC547 TRANSISTOR</a:t>
+            </a:r>
+          </a:p>
+        </p:txBody>
+      </p:sp>
+    </p:spTree>
+    <p:extLst>
+      <p:ext uri="{BB962C8B-B14F-4D97-AF65-F5344CB8AC3E}">
+        <p14:creationId xmlns:p14="http://schemas.microsoft.com/office/powerpoint/2010/main" val="2494390403"/>
+      </p:ext>
+    </p:extLst>
+  </p:cSld>
+  <p:clrMapOvr>
+    <a:masterClrMapping/>
+  </p:clrMapOvr>
+  <p:transition spd="slow">
+    <p:strips dir="rd"/>
+  </p:transition>
 </p:sld>
 </file>
 

--- a/TTL/NOT GATE/NOT TTL.pptx
+++ b/TTL/NOT GATE/NOT TTL.pptx
@@ -276,7 +276,7 @@
           <a:p>
             <a:fld id="{A6919780-8624-4B22-92F5-9C160EF8EA05}" type="datetimeFigureOut">
               <a:rPr lang="en-US" smtClean="0"/>
-              <a:t>5/19/2025</a:t>
+              <a:t>5/30/2025</a:t>
             </a:fld>
             <a:endParaRPr lang="en-US"/>
           </a:p>
@@ -474,7 +474,7 @@
           <a:p>
             <a:fld id="{A6919780-8624-4B22-92F5-9C160EF8EA05}" type="datetimeFigureOut">
               <a:rPr lang="en-US" smtClean="0"/>
-              <a:t>5/19/2025</a:t>
+              <a:t>5/30/2025</a:t>
             </a:fld>
             <a:endParaRPr lang="en-US"/>
           </a:p>
@@ -682,7 +682,7 @@
           <a:p>
             <a:fld id="{A6919780-8624-4B22-92F5-9C160EF8EA05}" type="datetimeFigureOut">
               <a:rPr lang="en-US" smtClean="0"/>
-              <a:t>5/19/2025</a:t>
+              <a:t>5/30/2025</a:t>
             </a:fld>
             <a:endParaRPr lang="en-US"/>
           </a:p>
@@ -880,7 +880,7 @@
           <a:p>
             <a:fld id="{A6919780-8624-4B22-92F5-9C160EF8EA05}" type="datetimeFigureOut">
               <a:rPr lang="en-US" smtClean="0"/>
-              <a:t>5/19/2025</a:t>
+              <a:t>5/30/2025</a:t>
             </a:fld>
             <a:endParaRPr lang="en-US"/>
           </a:p>
@@ -1155,7 +1155,7 @@
           <a:p>
             <a:fld id="{A6919780-8624-4B22-92F5-9C160EF8EA05}" type="datetimeFigureOut">
               <a:rPr lang="en-US" smtClean="0"/>
-              <a:t>5/19/2025</a:t>
+              <a:t>5/30/2025</a:t>
             </a:fld>
             <a:endParaRPr lang="en-US"/>
           </a:p>
@@ -1420,7 +1420,7 @@
           <a:p>
             <a:fld id="{A6919780-8624-4B22-92F5-9C160EF8EA05}" type="datetimeFigureOut">
               <a:rPr lang="en-US" smtClean="0"/>
-              <a:t>5/19/2025</a:t>
+              <a:t>5/30/2025</a:t>
             </a:fld>
             <a:endParaRPr lang="en-US"/>
           </a:p>
@@ -1832,7 +1832,7 @@
           <a:p>
             <a:fld id="{A6919780-8624-4B22-92F5-9C160EF8EA05}" type="datetimeFigureOut">
               <a:rPr lang="en-US" smtClean="0"/>
-              <a:t>5/19/2025</a:t>
+              <a:t>5/30/2025</a:t>
             </a:fld>
             <a:endParaRPr lang="en-US"/>
           </a:p>
@@ -1973,7 +1973,7 @@
           <a:p>
             <a:fld id="{A6919780-8624-4B22-92F5-9C160EF8EA05}" type="datetimeFigureOut">
               <a:rPr lang="en-US" smtClean="0"/>
-              <a:t>5/19/2025</a:t>
+              <a:t>5/30/2025</a:t>
             </a:fld>
             <a:endParaRPr lang="en-US"/>
           </a:p>
@@ -2086,7 +2086,7 @@
           <a:p>
             <a:fld id="{A6919780-8624-4B22-92F5-9C160EF8EA05}" type="datetimeFigureOut">
               <a:rPr lang="en-US" smtClean="0"/>
-              <a:t>5/19/2025</a:t>
+              <a:t>5/30/2025</a:t>
             </a:fld>
             <a:endParaRPr lang="en-US"/>
           </a:p>
@@ -2397,7 +2397,7 @@
           <a:p>
             <a:fld id="{A6919780-8624-4B22-92F5-9C160EF8EA05}" type="datetimeFigureOut">
               <a:rPr lang="en-US" smtClean="0"/>
-              <a:t>5/19/2025</a:t>
+              <a:t>5/30/2025</a:t>
             </a:fld>
             <a:endParaRPr lang="en-US"/>
           </a:p>
@@ -2685,7 +2685,7 @@
           <a:p>
             <a:fld id="{A6919780-8624-4B22-92F5-9C160EF8EA05}" type="datetimeFigureOut">
               <a:rPr lang="en-US" smtClean="0"/>
-              <a:t>5/19/2025</a:t>
+              <a:t>5/30/2025</a:t>
             </a:fld>
             <a:endParaRPr lang="en-US"/>
           </a:p>
@@ -2926,7 +2926,7 @@
           <a:p>
             <a:fld id="{A6919780-8624-4B22-92F5-9C160EF8EA05}" type="datetimeFigureOut">
               <a:rPr lang="en-US" smtClean="0"/>
-              <a:t>5/19/2025</a:t>
+              <a:t>5/30/2025</a:t>
             </a:fld>
             <a:endParaRPr lang="en-US"/>
           </a:p>
@@ -14888,10 +14888,15 @@
                 <a:latin typeface="Segoe UI" panose="020B0502040204020203" pitchFamily="34" charset="0"/>
                 <a:cs typeface="Segoe UI" panose="020B0502040204020203" pitchFamily="34" charset="0"/>
               </a:rPr>
-              <a:t>INVERTER/NOT GATE USING</a:t>
+              <a:t>INVERTER/</a:t>
             </a:r>
-          </a:p>
-          <a:p>
+            <a:r>
+              <a:rPr lang="en-US" sz="6600" b="1" dirty="0">
+                <a:latin typeface="Segoe UI" panose="020B0502040204020203" pitchFamily="34" charset="0"/>
+                <a:cs typeface="Segoe UI" panose="020B0502040204020203" pitchFamily="34" charset="0"/>
+              </a:rPr>
+              <a:t>NOT GATE </a:t>
+            </a:r>
             <a:r>
               <a:rPr lang="en-US" sz="6600" b="1" dirty="0">
                 <a:solidFill>
@@ -14900,7 +14905,26 @@
                 <a:latin typeface="Segoe UI" panose="020B0502040204020203" pitchFamily="34" charset="0"/>
                 <a:cs typeface="Segoe UI" panose="020B0502040204020203" pitchFamily="34" charset="0"/>
               </a:rPr>
-              <a:t>BC547 TRANSISTOR</a:t>
+              <a:t>USING</a:t>
+            </a:r>
+          </a:p>
+          <a:p>
+            <a:r>
+              <a:rPr lang="en-US" sz="6600" b="1" dirty="0">
+                <a:latin typeface="Segoe UI" panose="020B0502040204020203" pitchFamily="34" charset="0"/>
+                <a:cs typeface="Segoe UI" panose="020B0502040204020203" pitchFamily="34" charset="0"/>
+              </a:rPr>
+              <a:t>BC547</a:t>
+            </a:r>
+            <a:r>
+              <a:rPr lang="en-US" sz="6600" b="1" dirty="0">
+                <a:solidFill>
+                  <a:srgbClr val="FF0000"/>
+                </a:solidFill>
+                <a:latin typeface="Segoe UI" panose="020B0502040204020203" pitchFamily="34" charset="0"/>
+                <a:cs typeface="Segoe UI" panose="020B0502040204020203" pitchFamily="34" charset="0"/>
+              </a:rPr>
+              <a:t> TRANSISTOR</a:t>
             </a:r>
           </a:p>
         </p:txBody>
